--- a/1차 프로젝트/기획/기획서.pptx
+++ b/1차 프로젝트/기획/기획서.pptx
@@ -6527,10 +6527,10 @@
       </p:sp>
       <p:pic>
         <p:nvPicPr>
-          <p:cNvPr id="13" name="그림 12">
+          <p:cNvPr id="3" name="그림 2">
             <a:extLst>
               <a:ext uri="{FF2B5EF4-FFF2-40B4-BE49-F238E27FC236}">
-                <a16:creationId xmlns:a16="http://schemas.microsoft.com/office/drawing/2014/main" id="{C3E47092-7530-6E9D-2551-F0A4B2C8907D}"/>
+                <a16:creationId xmlns:a16="http://schemas.microsoft.com/office/drawing/2014/main" id="{04D579A6-50E3-3440-BFBB-E4446852BF18}"/>
               </a:ext>
             </a:extLst>
           </p:cNvPr>
@@ -6547,8 +6547,8 @@
         </p:blipFill>
         <p:spPr>
           <a:xfrm>
-            <a:off x="250825" y="2189341"/>
-            <a:ext cx="11690350" cy="3540723"/>
+            <a:off x="403907" y="2210598"/>
+            <a:ext cx="11384186" cy="3447993"/>
           </a:xfrm>
           <a:prstGeom prst="rect">
             <a:avLst/>

--- a/1차 프로젝트/기획/기획서.pptx
+++ b/1차 프로젝트/기획/기획서.pptx
@@ -5357,7 +5357,7 @@
           </a:prstGeom>
           <a:solidFill>
             <a:schemeClr val="tx1">
-              <a:alpha val="80000"/>
+              <a:alpha val="70000"/>
             </a:schemeClr>
           </a:solidFill>
           <a:ln>
@@ -5409,7 +5409,7 @@
           </a:prstGeom>
           <a:solidFill>
             <a:schemeClr val="tx1">
-              <a:alpha val="80000"/>
+              <a:alpha val="70000"/>
             </a:schemeClr>
           </a:solidFill>
           <a:ln>

--- a/1차 프로젝트/기획/기획서.pptx
+++ b/1차 프로젝트/기획/기획서.pptx
@@ -15,8 +15,8 @@
     <p:sldId id="259" r:id="rId6"/>
     <p:sldId id="281" r:id="rId7"/>
     <p:sldId id="282" r:id="rId8"/>
-    <p:sldId id="284" r:id="rId9"/>
-    <p:sldId id="283" r:id="rId10"/>
+    <p:sldId id="283" r:id="rId9"/>
+    <p:sldId id="284" r:id="rId10"/>
   </p:sldIdLst>
   <p:sldSz cx="12192000" cy="6858000"/>
   <p:notesSz cx="6858000" cy="9144000"/>
@@ -143,8 +143,8 @@
           <p14:sldIdLst>
             <p14:sldId id="281"/>
             <p14:sldId id="282"/>
+            <p14:sldId id="283"/>
             <p14:sldId id="284"/>
-            <p14:sldId id="283"/>
           </p14:sldIdLst>
         </p14:section>
       </p14:sectionLst>
@@ -6613,8 +6613,8 @@
         </p:blipFill>
         <p:spPr>
           <a:xfrm>
-            <a:off x="363516" y="1852429"/>
-            <a:ext cx="8657112" cy="4304926"/>
+            <a:off x="363516" y="1980000"/>
+            <a:ext cx="8640000" cy="4296417"/>
           </a:xfrm>
           <a:prstGeom prst="rect">
             <a:avLst/>
@@ -6641,7 +6641,7 @@
           <p:nvPr>
             <p:extLst>
               <p:ext uri="{D42A27DB-BD31-4B8C-83A1-F6EECF244321}">
-                <p14:modId xmlns:p14="http://schemas.microsoft.com/office/powerpoint/2010/main" val="264044697"/>
+                <p14:modId xmlns:p14="http://schemas.microsoft.com/office/powerpoint/2010/main" val="169315865"/>
               </p:ext>
             </p:extLst>
           </p:nvPr>
@@ -8486,10 +8486,10 @@
       </p:grpSpPr>
       <p:pic>
         <p:nvPicPr>
-          <p:cNvPr id="3" name="그림 2" descr="텍스트, 스크린샷, 폰트, 번호이(가) 표시된 사진&#10;&#10;AI가 생성한 콘텐츠는 부정확할 수 있습니다.">
+          <p:cNvPr id="10" name="그림 9" descr="텍스트, 스크린샷, 폰트, 로고이(가) 표시된 사진&#10;&#10;AI가 생성한 콘텐츠는 부정확할 수 있습니다.">
             <a:extLst>
               <a:ext uri="{FF2B5EF4-FFF2-40B4-BE49-F238E27FC236}">
-                <a16:creationId xmlns:a16="http://schemas.microsoft.com/office/drawing/2014/main" id="{6D5E5EEB-C914-F0C1-6A7C-72E37E4E7406}"/>
+                <a16:creationId xmlns:a16="http://schemas.microsoft.com/office/drawing/2014/main" id="{FB42D041-C1E9-D3B8-368E-3B76ECA64D70}"/>
               </a:ext>
             </a:extLst>
           </p:cNvPr>
@@ -8512,8 +8512,8 @@
         </p:blipFill>
         <p:spPr>
           <a:xfrm>
-            <a:off x="363516" y="1852429"/>
-            <a:ext cx="8657112" cy="4304926"/>
+            <a:off x="363516" y="1980000"/>
+            <a:ext cx="8640000" cy="4401590"/>
           </a:xfrm>
           <a:prstGeom prst="rect">
             <a:avLst/>
@@ -9516,11 +9516,17 @@
           <p:cNvGraphicFramePr>
             <a:graphicFrameLocks noGrp="1"/>
           </p:cNvGraphicFramePr>
-          <p:nvPr/>
+          <p:nvPr>
+            <p:extLst>
+              <p:ext uri="{D42A27DB-BD31-4B8C-83A1-F6EECF244321}">
+                <p14:modId xmlns:p14="http://schemas.microsoft.com/office/powerpoint/2010/main" val="2283821124"/>
+              </p:ext>
+            </p:extLst>
+          </p:nvPr>
         </p:nvGraphicFramePr>
         <p:xfrm>
           <a:off x="9221188" y="826547"/>
-          <a:ext cx="2607296" cy="2808000"/>
+          <a:ext cx="2607296" cy="2556000"/>
         </p:xfrm>
         <a:graphic>
           <a:graphicData uri="http://schemas.openxmlformats.org/drawingml/2006/table">
@@ -9691,15 +9697,7 @@
                       <a:pPr algn="l" latinLnBrk="1"/>
                       <a:r>
                         <a:rPr lang="ko-KR" altLang="en-US" sz="1200"/>
-                        <a:t>최근 </a:t>
-                      </a:r>
-                      <a:r>
-                        <a:rPr lang="en-US" altLang="ko-KR" sz="1200"/>
-                        <a:t>24</a:t>
-                      </a:r>
-                      <a:r>
-                        <a:rPr lang="ko-KR" altLang="en-US" sz="1200"/>
-                        <a:t>시간 섭취한 음식 영양소 수치 입력</a:t>
+                        <a:t>사용자 입력 데이터에 대한 고콜레스테롤 발생 위험도 시각화</a:t>
                       </a:r>
                     </a:p>
                   </a:txBody>
@@ -9815,15 +9813,7 @@
                       <a:pPr algn="l" latinLnBrk="1"/>
                       <a:r>
                         <a:rPr lang="ko-KR" altLang="en-US" sz="1200"/>
-                        <a:t>현재 사용 대상의 소득 수준</a:t>
-                      </a:r>
-                      <a:r>
-                        <a:rPr lang="en-US" altLang="ko-KR" sz="1200"/>
-                        <a:t>, </a:t>
-                      </a:r>
-                      <a:r>
-                        <a:rPr lang="ko-KR" altLang="en-US" sz="1200"/>
-                        <a:t>교육 수준 입력</a:t>
+                        <a:t>위험도에 따라 위험 등급 표시</a:t>
                       </a:r>
                     </a:p>
                   </a:txBody>
@@ -9875,8 +9865,8 @@
                   </a:ext>
                 </a:extLst>
               </a:tr>
-              <a:tr h="612000">
-                <a:tc>
+              <a:tr h="360000">
+                <a:tc gridSpan="2">
                   <a:txBody>
                     <a:bodyPr/>
                     <a:lstStyle/>
@@ -9884,12 +9874,11 @@
                       <a:pPr algn="ctr" latinLnBrk="1"/>
                       <a:r>
                         <a:rPr lang="en-US" altLang="ko-KR" sz="1200"/>
-                        <a:t>3</a:t>
+                        <a:t>Check Point</a:t>
                       </a:r>
-                      <a:endParaRPr lang="ko-KR" altLang="en-US" sz="1200"/>
                     </a:p>
                   </a:txBody>
-                  <a:tcPr>
+                  <a:tcPr anchor="ctr">
                     <a:lnL w="12700" cap="flat" cmpd="sng" algn="ctr">
                       <a:solidFill>
                         <a:schemeClr val="tx1"/>
@@ -9927,20 +9916,18 @@
                       <a:tailEnd type="none" w="med" len="med"/>
                     </a:lnB>
                     <a:solidFill>
-                      <a:schemeClr val="bg1"/>
+                      <a:schemeClr val="bg1">
+                        <a:lumMod val="85000"/>
+                      </a:schemeClr>
                     </a:solidFill>
                   </a:tcPr>
                 </a:tc>
-                <a:tc>
+                <a:tc hMerge="1">
                   <a:txBody>
                     <a:bodyPr/>
                     <a:lstStyle/>
                     <a:p>
-                      <a:pPr algn="l" latinLnBrk="1"/>
-                      <a:r>
-                        <a:rPr lang="ko-KR" altLang="en-US" sz="1200"/>
-                        <a:t>운동과 흡연 여부 확인</a:t>
-                      </a:r>
+                      <a:endParaRPr/>
                     </a:p>
                   </a:txBody>
                   <a:tcPr anchor="ctr">
@@ -9992,20 +9979,19 @@
                 </a:extLst>
               </a:tr>
               <a:tr h="612000">
-                <a:tc>
+                <a:tc gridSpan="2">
                   <a:txBody>
                     <a:bodyPr/>
                     <a:lstStyle/>
                     <a:p>
-                      <a:pPr algn="ctr" latinLnBrk="1"/>
+                      <a:pPr algn="just" latinLnBrk="1"/>
                       <a:r>
-                        <a:rPr lang="en-US" altLang="ko-KR" sz="1200"/>
-                        <a:t>4</a:t>
+                        <a:rPr lang="ko-KR" altLang="en-US" sz="1200"/>
+                        <a:t>스크롤을 내려서 다음 화면으로 이동</a:t>
                       </a:r>
-                      <a:endParaRPr lang="ko-KR" altLang="en-US" sz="1200"/>
                     </a:p>
                   </a:txBody>
-                  <a:tcPr>
+                  <a:tcPr anchor="ctr">
                     <a:lnL w="12700" cap="flat" cmpd="sng" algn="ctr">
                       <a:solidFill>
                         <a:schemeClr val="tx1"/>
@@ -10047,16 +10033,12 @@
                     </a:solidFill>
                   </a:tcPr>
                 </a:tc>
-                <a:tc>
+                <a:tc hMerge="1">
                   <a:txBody>
                     <a:bodyPr/>
                     <a:lstStyle/>
                     <a:p>
-                      <a:pPr algn="l" latinLnBrk="1"/>
-                      <a:r>
-                        <a:rPr lang="ko-KR" altLang="en-US" sz="1200"/>
-                        <a:t>입력한 정보에 대한 분석 결과 페이지로 이동</a:t>
-                      </a:r>
+                      <a:endParaRPr/>
                     </a:p>
                   </a:txBody>
                   <a:tcPr anchor="ctr">
@@ -10127,7 +10109,7 @@
         </p:nvSpPr>
         <p:spPr>
           <a:xfrm>
-            <a:off x="380895" y="2748597"/>
+            <a:off x="3826780" y="3700134"/>
             <a:ext cx="360000" cy="360000"/>
           </a:xfrm>
           <a:prstGeom prst="ellipse">
@@ -10174,10 +10156,10 @@
       </p:sp>
       <p:sp>
         <p:nvSpPr>
-          <p:cNvPr id="6" name="타원 5">
+          <p:cNvPr id="11" name="타원 10">
             <a:extLst>
               <a:ext uri="{FF2B5EF4-FFF2-40B4-BE49-F238E27FC236}">
-                <a16:creationId xmlns:a16="http://schemas.microsoft.com/office/drawing/2014/main" id="{36530CCA-5A69-2CF3-5C54-34468856DFB6}"/>
+                <a16:creationId xmlns:a16="http://schemas.microsoft.com/office/drawing/2014/main" id="{F23660EC-BF39-B732-51DC-0C653706EBCB}"/>
               </a:ext>
             </a:extLst>
           </p:cNvPr>
@@ -10188,7 +10170,7 @@
         </p:nvSpPr>
         <p:spPr>
           <a:xfrm>
-            <a:off x="3249774" y="2748597"/>
+            <a:off x="3826780" y="5259853"/>
             <a:ext cx="360000" cy="360000"/>
           </a:xfrm>
           <a:prstGeom prst="ellipse">
@@ -10226,126 +10208,6 @@
                 <a:latin typeface="+mn-ea"/>
               </a:rPr>
               <a:t>2</a:t>
-            </a:r>
-            <a:endParaRPr lang="ko-KR" altLang="en-US" sz="2000">
-              <a:latin typeface="+mn-ea"/>
-            </a:endParaRPr>
-          </a:p>
-        </p:txBody>
-      </p:sp>
-      <p:sp>
-        <p:nvSpPr>
-          <p:cNvPr id="7" name="타원 6">
-            <a:extLst>
-              <a:ext uri="{FF2B5EF4-FFF2-40B4-BE49-F238E27FC236}">
-                <a16:creationId xmlns:a16="http://schemas.microsoft.com/office/drawing/2014/main" id="{3194E283-4A82-FAAF-D7D6-6A6BB04817AF}"/>
-              </a:ext>
-            </a:extLst>
-          </p:cNvPr>
-          <p:cNvSpPr/>
-          <p:nvPr/>
-        </p:nvSpPr>
-        <p:spPr>
-          <a:xfrm>
-            <a:off x="6096000" y="2748597"/>
-            <a:ext cx="360000" cy="360000"/>
-          </a:xfrm>
-          <a:prstGeom prst="ellipse">
-            <a:avLst/>
-          </a:prstGeom>
-          <a:solidFill>
-            <a:srgbClr val="C00000">
-              <a:alpha val="60000"/>
-            </a:srgbClr>
-          </a:solidFill>
-        </p:spPr>
-        <p:style>
-          <a:lnRef idx="2">
-            <a:schemeClr val="accent1">
-              <a:shade val="15000"/>
-            </a:schemeClr>
-          </a:lnRef>
-          <a:fillRef idx="1">
-            <a:schemeClr val="accent1"/>
-          </a:fillRef>
-          <a:effectRef idx="0">
-            <a:schemeClr val="accent1"/>
-          </a:effectRef>
-          <a:fontRef idx="minor">
-            <a:schemeClr val="lt1"/>
-          </a:fontRef>
-        </p:style>
-        <p:txBody>
-          <a:bodyPr rtlCol="0" anchor="ctr"/>
-          <a:lstStyle/>
-          <a:p>
-            <a:pPr algn="ctr"/>
-            <a:r>
-              <a:rPr lang="en-US" altLang="ko-KR" sz="2000">
-                <a:latin typeface="+mn-ea"/>
-              </a:rPr>
-              <a:t>3</a:t>
-            </a:r>
-            <a:endParaRPr lang="ko-KR" altLang="en-US" sz="2000">
-              <a:latin typeface="+mn-ea"/>
-            </a:endParaRPr>
-          </a:p>
-        </p:txBody>
-      </p:sp>
-      <p:sp>
-        <p:nvSpPr>
-          <p:cNvPr id="8" name="타원 7">
-            <a:extLst>
-              <a:ext uri="{FF2B5EF4-FFF2-40B4-BE49-F238E27FC236}">
-                <a16:creationId xmlns:a16="http://schemas.microsoft.com/office/drawing/2014/main" id="{DD2E26A3-53FD-07AE-4CED-A337E917CD15}"/>
-              </a:ext>
-            </a:extLst>
-          </p:cNvPr>
-          <p:cNvSpPr>
-            <a:spLocks noChangeAspect="1"/>
-          </p:cNvSpPr>
-          <p:nvPr/>
-        </p:nvSpPr>
-        <p:spPr>
-          <a:xfrm>
-            <a:off x="3626056" y="5472112"/>
-            <a:ext cx="360000" cy="360000"/>
-          </a:xfrm>
-          <a:prstGeom prst="ellipse">
-            <a:avLst/>
-          </a:prstGeom>
-          <a:solidFill>
-            <a:srgbClr val="C00000">
-              <a:alpha val="60000"/>
-            </a:srgbClr>
-          </a:solidFill>
-        </p:spPr>
-        <p:style>
-          <a:lnRef idx="2">
-            <a:schemeClr val="accent1">
-              <a:shade val="15000"/>
-            </a:schemeClr>
-          </a:lnRef>
-          <a:fillRef idx="1">
-            <a:schemeClr val="accent1"/>
-          </a:fillRef>
-          <a:effectRef idx="0">
-            <a:schemeClr val="accent1"/>
-          </a:effectRef>
-          <a:fontRef idx="minor">
-            <a:schemeClr val="lt1"/>
-          </a:fontRef>
-        </p:style>
-        <p:txBody>
-          <a:bodyPr rtlCol="0" anchor="ctr"/>
-          <a:lstStyle/>
-          <a:p>
-            <a:pPr algn="ctr"/>
-            <a:r>
-              <a:rPr lang="en-US" altLang="ko-KR" sz="2000">
-                <a:latin typeface="+mn-ea"/>
-              </a:rPr>
-              <a:t>4</a:t>
             </a:r>
             <a:endParaRPr lang="ko-KR" altLang="en-US" sz="2000">
               <a:latin typeface="+mn-ea"/>
@@ -10385,10 +10247,10 @@
       </p:grpSpPr>
       <p:pic>
         <p:nvPicPr>
-          <p:cNvPr id="3" name="그림 2" descr="텍스트, 스크린샷, 폰트, 번호이(가) 표시된 사진&#10;&#10;AI가 생성한 콘텐츠는 부정확할 수 있습니다.">
+          <p:cNvPr id="8" name="그림 7" descr="텍스트, 스크린샷, 도표, 폰트이(가) 표시된 사진&#10;&#10;AI가 생성한 콘텐츠는 부정확할 수 있습니다.">
             <a:extLst>
               <a:ext uri="{FF2B5EF4-FFF2-40B4-BE49-F238E27FC236}">
-                <a16:creationId xmlns:a16="http://schemas.microsoft.com/office/drawing/2014/main" id="{6D5E5EEB-C914-F0C1-6A7C-72E37E4E7406}"/>
+                <a16:creationId xmlns:a16="http://schemas.microsoft.com/office/drawing/2014/main" id="{C98737AC-8731-A304-4FF3-3824A063D168}"/>
               </a:ext>
             </a:extLst>
           </p:cNvPr>
@@ -10411,8 +10273,8 @@
         </p:blipFill>
         <p:spPr>
           <a:xfrm>
-            <a:off x="363516" y="1852429"/>
-            <a:ext cx="8657112" cy="4304926"/>
+            <a:off x="363516" y="1980000"/>
+            <a:ext cx="8640000" cy="3606148"/>
           </a:xfrm>
           <a:prstGeom prst="rect">
             <a:avLst/>
@@ -10436,7 +10298,13 @@
           <p:cNvGraphicFramePr>
             <a:graphicFrameLocks noGrp="1"/>
           </p:cNvGraphicFramePr>
-          <p:nvPr/>
+          <p:nvPr>
+            <p:extLst>
+              <p:ext uri="{D42A27DB-BD31-4B8C-83A1-F6EECF244321}">
+                <p14:modId xmlns:p14="http://schemas.microsoft.com/office/powerpoint/2010/main" val="4224088285"/>
+              </p:ext>
+            </p:extLst>
+          </p:nvPr>
         </p:nvGraphicFramePr>
         <p:xfrm>
           <a:off x="363516" y="826547"/>
@@ -10719,7 +10587,7 @@
                           <a:latin typeface="+mn-ea"/>
                           <a:ea typeface="+mn-ea"/>
                         </a:rPr>
-                        <a:t>UI-Output_1</a:t>
+                        <a:t>UI-Output_2</a:t>
                       </a:r>
                       <a:endParaRPr lang="ko-KR" altLang="en-US" sz="1200" b="0">
                         <a:solidFill>
@@ -11409,11 +11277,17 @@
           <p:cNvGraphicFramePr>
             <a:graphicFrameLocks noGrp="1"/>
           </p:cNvGraphicFramePr>
-          <p:nvPr/>
+          <p:nvPr>
+            <p:extLst>
+              <p:ext uri="{D42A27DB-BD31-4B8C-83A1-F6EECF244321}">
+                <p14:modId xmlns:p14="http://schemas.microsoft.com/office/powerpoint/2010/main" val="3673786874"/>
+              </p:ext>
+            </p:extLst>
+          </p:nvPr>
         </p:nvGraphicFramePr>
         <p:xfrm>
           <a:off x="9221188" y="826547"/>
-          <a:ext cx="2607296" cy="2808000"/>
+          <a:ext cx="2607296" cy="2556000"/>
         </p:xfrm>
         <a:graphic>
           <a:graphicData uri="http://schemas.openxmlformats.org/drawingml/2006/table">
@@ -11584,15 +11458,7 @@
                       <a:pPr algn="l" latinLnBrk="1"/>
                       <a:r>
                         <a:rPr lang="ko-KR" altLang="en-US" sz="1200"/>
-                        <a:t>최근 </a:t>
-                      </a:r>
-                      <a:r>
-                        <a:rPr lang="en-US" altLang="ko-KR" sz="1200"/>
-                        <a:t>24</a:t>
-                      </a:r>
-                      <a:r>
-                        <a:rPr lang="ko-KR" altLang="en-US" sz="1200"/>
-                        <a:t>시간 섭취한 음식 영양소 수치 입력</a:t>
+                        <a:t>입력받은 사용자 영양소 섭취량과 권장 섭취량 그래프 비교</a:t>
                       </a:r>
                     </a:p>
                   </a:txBody>
@@ -11708,15 +11574,15 @@
                       <a:pPr algn="l" latinLnBrk="1"/>
                       <a:r>
                         <a:rPr lang="ko-KR" altLang="en-US" sz="1200"/>
-                        <a:t>현재 사용 대상의 소득 수준</a:t>
+                        <a:t>마우스를 올려 수치 비교</a:t>
                       </a:r>
                       <a:r>
                         <a:rPr lang="en-US" altLang="ko-KR" sz="1200"/>
-                        <a:t>, </a:t>
+                        <a:t>·</a:t>
                       </a:r>
                       <a:r>
                         <a:rPr lang="ko-KR" altLang="en-US" sz="1200"/>
-                        <a:t>교육 수준 입력</a:t>
+                        <a:t>확인</a:t>
                       </a:r>
                     </a:p>
                   </a:txBody>
@@ -11768,8 +11634,8 @@
                   </a:ext>
                 </a:extLst>
               </a:tr>
-              <a:tr h="612000">
-                <a:tc>
+              <a:tr h="360000">
+                <a:tc gridSpan="2">
                   <a:txBody>
                     <a:bodyPr/>
                     <a:lstStyle/>
@@ -11777,12 +11643,11 @@
                       <a:pPr algn="ctr" latinLnBrk="1"/>
                       <a:r>
                         <a:rPr lang="en-US" altLang="ko-KR" sz="1200"/>
-                        <a:t>3</a:t>
+                        <a:t>Check Point</a:t>
                       </a:r>
-                      <a:endParaRPr lang="ko-KR" altLang="en-US" sz="1200"/>
                     </a:p>
                   </a:txBody>
-                  <a:tcPr>
+                  <a:tcPr anchor="ctr">
                     <a:lnL w="12700" cap="flat" cmpd="sng" algn="ctr">
                       <a:solidFill>
                         <a:schemeClr val="tx1"/>
@@ -11820,20 +11685,18 @@
                       <a:tailEnd type="none" w="med" len="med"/>
                     </a:lnB>
                     <a:solidFill>
-                      <a:schemeClr val="bg1"/>
+                      <a:schemeClr val="bg1">
+                        <a:lumMod val="85000"/>
+                      </a:schemeClr>
                     </a:solidFill>
                   </a:tcPr>
                 </a:tc>
-                <a:tc>
+                <a:tc hMerge="1">
                   <a:txBody>
                     <a:bodyPr/>
                     <a:lstStyle/>
                     <a:p>
-                      <a:pPr algn="l" latinLnBrk="1"/>
-                      <a:r>
-                        <a:rPr lang="ko-KR" altLang="en-US" sz="1200"/>
-                        <a:t>운동과 흡연 여부 확인</a:t>
-                      </a:r>
+                      <a:endParaRPr/>
                     </a:p>
                   </a:txBody>
                   <a:tcPr anchor="ctr">
@@ -11885,20 +11748,19 @@
                 </a:extLst>
               </a:tr>
               <a:tr h="612000">
-                <a:tc>
+                <a:tc gridSpan="2">
                   <a:txBody>
                     <a:bodyPr/>
                     <a:lstStyle/>
                     <a:p>
-                      <a:pPr algn="ctr" latinLnBrk="1"/>
+                      <a:pPr algn="just" latinLnBrk="1"/>
                       <a:r>
-                        <a:rPr lang="en-US" altLang="ko-KR" sz="1200"/>
-                        <a:t>4</a:t>
+                        <a:rPr lang="ko-KR" altLang="en-US" sz="1200"/>
+                        <a:t>스크롤을 내려서 다음 화면으로 이동</a:t>
                       </a:r>
-                      <a:endParaRPr lang="ko-KR" altLang="en-US" sz="1200"/>
                     </a:p>
                   </a:txBody>
-                  <a:tcPr>
+                  <a:tcPr anchor="ctr">
                     <a:lnL w="12700" cap="flat" cmpd="sng" algn="ctr">
                       <a:solidFill>
                         <a:schemeClr val="tx1"/>
@@ -11940,16 +11802,12 @@
                     </a:solidFill>
                   </a:tcPr>
                 </a:tc>
-                <a:tc>
+                <a:tc hMerge="1">
                   <a:txBody>
                     <a:bodyPr/>
                     <a:lstStyle/>
                     <a:p>
-                      <a:pPr algn="l" latinLnBrk="1"/>
-                      <a:r>
-                        <a:rPr lang="ko-KR" altLang="en-US" sz="1200"/>
-                        <a:t>입력한 정보에 대한 분석 결과 페이지로 이동</a:t>
-                      </a:r>
+                      <a:endParaRPr/>
                     </a:p>
                   </a:txBody>
                   <a:tcPr anchor="ctr">
@@ -12020,7 +11878,7 @@
         </p:nvSpPr>
         <p:spPr>
           <a:xfrm>
-            <a:off x="380895" y="2748597"/>
+            <a:off x="1233600" y="3249000"/>
             <a:ext cx="360000" cy="360000"/>
           </a:xfrm>
           <a:prstGeom prst="ellipse">
@@ -12067,10 +11925,10 @@
       </p:sp>
       <p:sp>
         <p:nvSpPr>
-          <p:cNvPr id="6" name="타원 5">
+          <p:cNvPr id="9" name="타원 8">
             <a:extLst>
               <a:ext uri="{FF2B5EF4-FFF2-40B4-BE49-F238E27FC236}">
-                <a16:creationId xmlns:a16="http://schemas.microsoft.com/office/drawing/2014/main" id="{36530CCA-5A69-2CF3-5C54-34468856DFB6}"/>
+                <a16:creationId xmlns:a16="http://schemas.microsoft.com/office/drawing/2014/main" id="{F7CB8742-1CD9-D6BE-CB25-F1FC9B0F484E}"/>
               </a:ext>
             </a:extLst>
           </p:cNvPr>
@@ -12081,7 +11939,7 @@
         </p:nvSpPr>
         <p:spPr>
           <a:xfrm>
-            <a:off x="3249774" y="2748597"/>
+            <a:off x="3729150" y="3249000"/>
             <a:ext cx="360000" cy="360000"/>
           </a:xfrm>
           <a:prstGeom prst="ellipse">
@@ -12126,130 +11984,10 @@
           </a:p>
         </p:txBody>
       </p:sp>
-      <p:sp>
-        <p:nvSpPr>
-          <p:cNvPr id="7" name="타원 6">
-            <a:extLst>
-              <a:ext uri="{FF2B5EF4-FFF2-40B4-BE49-F238E27FC236}">
-                <a16:creationId xmlns:a16="http://schemas.microsoft.com/office/drawing/2014/main" id="{3194E283-4A82-FAAF-D7D6-6A6BB04817AF}"/>
-              </a:ext>
-            </a:extLst>
-          </p:cNvPr>
-          <p:cNvSpPr/>
-          <p:nvPr/>
-        </p:nvSpPr>
-        <p:spPr>
-          <a:xfrm>
-            <a:off x="6096000" y="2748597"/>
-            <a:ext cx="360000" cy="360000"/>
-          </a:xfrm>
-          <a:prstGeom prst="ellipse">
-            <a:avLst/>
-          </a:prstGeom>
-          <a:solidFill>
-            <a:srgbClr val="C00000">
-              <a:alpha val="60000"/>
-            </a:srgbClr>
-          </a:solidFill>
-        </p:spPr>
-        <p:style>
-          <a:lnRef idx="2">
-            <a:schemeClr val="accent1">
-              <a:shade val="15000"/>
-            </a:schemeClr>
-          </a:lnRef>
-          <a:fillRef idx="1">
-            <a:schemeClr val="accent1"/>
-          </a:fillRef>
-          <a:effectRef idx="0">
-            <a:schemeClr val="accent1"/>
-          </a:effectRef>
-          <a:fontRef idx="minor">
-            <a:schemeClr val="lt1"/>
-          </a:fontRef>
-        </p:style>
-        <p:txBody>
-          <a:bodyPr rtlCol="0" anchor="ctr"/>
-          <a:lstStyle/>
-          <a:p>
-            <a:pPr algn="ctr"/>
-            <a:r>
-              <a:rPr lang="en-US" altLang="ko-KR" sz="2000">
-                <a:latin typeface="+mn-ea"/>
-              </a:rPr>
-              <a:t>3</a:t>
-            </a:r>
-            <a:endParaRPr lang="ko-KR" altLang="en-US" sz="2000">
-              <a:latin typeface="+mn-ea"/>
-            </a:endParaRPr>
-          </a:p>
-        </p:txBody>
-      </p:sp>
-      <p:sp>
-        <p:nvSpPr>
-          <p:cNvPr id="8" name="타원 7">
-            <a:extLst>
-              <a:ext uri="{FF2B5EF4-FFF2-40B4-BE49-F238E27FC236}">
-                <a16:creationId xmlns:a16="http://schemas.microsoft.com/office/drawing/2014/main" id="{DD2E26A3-53FD-07AE-4CED-A337E917CD15}"/>
-              </a:ext>
-            </a:extLst>
-          </p:cNvPr>
-          <p:cNvSpPr>
-            <a:spLocks noChangeAspect="1"/>
-          </p:cNvSpPr>
-          <p:nvPr/>
-        </p:nvSpPr>
-        <p:spPr>
-          <a:xfrm>
-            <a:off x="3626056" y="5472112"/>
-            <a:ext cx="360000" cy="360000"/>
-          </a:xfrm>
-          <a:prstGeom prst="ellipse">
-            <a:avLst/>
-          </a:prstGeom>
-          <a:solidFill>
-            <a:srgbClr val="C00000">
-              <a:alpha val="60000"/>
-            </a:srgbClr>
-          </a:solidFill>
-        </p:spPr>
-        <p:style>
-          <a:lnRef idx="2">
-            <a:schemeClr val="accent1">
-              <a:shade val="15000"/>
-            </a:schemeClr>
-          </a:lnRef>
-          <a:fillRef idx="1">
-            <a:schemeClr val="accent1"/>
-          </a:fillRef>
-          <a:effectRef idx="0">
-            <a:schemeClr val="accent1"/>
-          </a:effectRef>
-          <a:fontRef idx="minor">
-            <a:schemeClr val="lt1"/>
-          </a:fontRef>
-        </p:style>
-        <p:txBody>
-          <a:bodyPr rtlCol="0" anchor="ctr"/>
-          <a:lstStyle/>
-          <a:p>
-            <a:pPr algn="ctr"/>
-            <a:r>
-              <a:rPr lang="en-US" altLang="ko-KR" sz="2000">
-                <a:latin typeface="+mn-ea"/>
-              </a:rPr>
-              <a:t>4</a:t>
-            </a:r>
-            <a:endParaRPr lang="ko-KR" altLang="en-US" sz="2000">
-              <a:latin typeface="+mn-ea"/>
-            </a:endParaRPr>
-          </a:p>
-        </p:txBody>
-      </p:sp>
     </p:spTree>
     <p:extLst>
       <p:ext uri="{BB962C8B-B14F-4D97-AF65-F5344CB8AC3E}">
-        <p14:creationId xmlns:p14="http://schemas.microsoft.com/office/powerpoint/2010/main" val="882648026"/>
+        <p14:creationId xmlns:p14="http://schemas.microsoft.com/office/powerpoint/2010/main" val="1319614109"/>
       </p:ext>
     </p:extLst>
   </p:cSld>
@@ -12278,10 +12016,10 @@
       </p:grpSpPr>
       <p:pic>
         <p:nvPicPr>
-          <p:cNvPr id="3" name="그림 2" descr="텍스트, 스크린샷, 폰트, 번호이(가) 표시된 사진&#10;&#10;AI가 생성한 콘텐츠는 부정확할 수 있습니다.">
+          <p:cNvPr id="6" name="그림 5" descr="텍스트, 스크린샷, 폰트, 번호이(가) 표시된 사진&#10;&#10;AI가 생성한 콘텐츠는 부정확할 수 있습니다.">
             <a:extLst>
               <a:ext uri="{FF2B5EF4-FFF2-40B4-BE49-F238E27FC236}">
-                <a16:creationId xmlns:a16="http://schemas.microsoft.com/office/drawing/2014/main" id="{6D5E5EEB-C914-F0C1-6A7C-72E37E4E7406}"/>
+                <a16:creationId xmlns:a16="http://schemas.microsoft.com/office/drawing/2014/main" id="{7AB0E476-9762-F85F-66A4-1AB019C7BF6C}"/>
               </a:ext>
             </a:extLst>
           </p:cNvPr>
@@ -12304,8 +12042,8 @@
         </p:blipFill>
         <p:spPr>
           <a:xfrm>
-            <a:off x="363516" y="1852429"/>
-            <a:ext cx="8657112" cy="4304926"/>
+            <a:off x="363516" y="1980000"/>
+            <a:ext cx="8640000" cy="4429091"/>
           </a:xfrm>
           <a:prstGeom prst="rect">
             <a:avLst/>
@@ -12329,7 +12067,13 @@
           <p:cNvGraphicFramePr>
             <a:graphicFrameLocks noGrp="1"/>
           </p:cNvGraphicFramePr>
-          <p:nvPr/>
+          <p:nvPr>
+            <p:extLst>
+              <p:ext uri="{D42A27DB-BD31-4B8C-83A1-F6EECF244321}">
+                <p14:modId xmlns:p14="http://schemas.microsoft.com/office/powerpoint/2010/main" val="2839636528"/>
+              </p:ext>
+            </p:extLst>
+          </p:nvPr>
         </p:nvGraphicFramePr>
         <p:xfrm>
           <a:off x="363516" y="826547"/>
@@ -12612,7 +12356,7 @@
                           <a:latin typeface="+mn-ea"/>
                           <a:ea typeface="+mn-ea"/>
                         </a:rPr>
-                        <a:t>UI-Output_1</a:t>
+                        <a:t>UI-Output_3</a:t>
                       </a:r>
                       <a:endParaRPr lang="ko-KR" altLang="en-US" sz="1200" b="0">
                         <a:solidFill>
@@ -13302,11 +13046,17 @@
           <p:cNvGraphicFramePr>
             <a:graphicFrameLocks noGrp="1"/>
           </p:cNvGraphicFramePr>
-          <p:nvPr/>
+          <p:nvPr>
+            <p:extLst>
+              <p:ext uri="{D42A27DB-BD31-4B8C-83A1-F6EECF244321}">
+                <p14:modId xmlns:p14="http://schemas.microsoft.com/office/powerpoint/2010/main" val="3470405660"/>
+              </p:ext>
+            </p:extLst>
+          </p:nvPr>
         </p:nvGraphicFramePr>
         <p:xfrm>
           <a:off x="9221188" y="826547"/>
-          <a:ext cx="2607296" cy="2808000"/>
+          <a:ext cx="2607296" cy="1584000"/>
         </p:xfrm>
         <a:graphic>
           <a:graphicData uri="http://schemas.openxmlformats.org/drawingml/2006/table">
@@ -13477,15 +13227,7 @@
                       <a:pPr algn="l" latinLnBrk="1"/>
                       <a:r>
                         <a:rPr lang="ko-KR" altLang="en-US" sz="1200"/>
-                        <a:t>최근 </a:t>
-                      </a:r>
-                      <a:r>
-                        <a:rPr lang="en-US" altLang="ko-KR" sz="1200"/>
-                        <a:t>24</a:t>
-                      </a:r>
-                      <a:r>
-                        <a:rPr lang="ko-KR" altLang="en-US" sz="1200"/>
-                        <a:t>시간 섭취한 음식 영양소 수치 입력</a:t>
+                        <a:t>섭취 영양별 위험도 비율 표시</a:t>
                       </a:r>
                     </a:p>
                   </a:txBody>
@@ -13601,15 +13343,7 @@
                       <a:pPr algn="l" latinLnBrk="1"/>
                       <a:r>
                         <a:rPr lang="ko-KR" altLang="en-US" sz="1200"/>
-                        <a:t>현재 사용 대상의 소득 수준</a:t>
-                      </a:r>
-                      <a:r>
-                        <a:rPr lang="en-US" altLang="ko-KR" sz="1200"/>
-                        <a:t>, </a:t>
-                      </a:r>
-                      <a:r>
-                        <a:rPr lang="ko-KR" altLang="en-US" sz="1200"/>
-                        <a:t>교육 수준 입력</a:t>
+                        <a:t>위험도에 따른 등급 표시</a:t>
                       </a:r>
                     </a:p>
                   </a:txBody>
@@ -13658,238 +13392,6 @@
                 <a:extLst>
                   <a:ext uri="{0D108BD9-81ED-4DB2-BD59-A6C34878D82A}">
                     <a16:rowId xmlns:a16="http://schemas.microsoft.com/office/drawing/2014/main" val="2924856255"/>
-                  </a:ext>
-                </a:extLst>
-              </a:tr>
-              <a:tr h="612000">
-                <a:tc>
-                  <a:txBody>
-                    <a:bodyPr/>
-                    <a:lstStyle/>
-                    <a:p>
-                      <a:pPr algn="ctr" latinLnBrk="1"/>
-                      <a:r>
-                        <a:rPr lang="en-US" altLang="ko-KR" sz="1200"/>
-                        <a:t>3</a:t>
-                      </a:r>
-                      <a:endParaRPr lang="ko-KR" altLang="en-US" sz="1200"/>
-                    </a:p>
-                  </a:txBody>
-                  <a:tcPr>
-                    <a:lnL w="12700" cap="flat" cmpd="sng" algn="ctr">
-                      <a:solidFill>
-                        <a:schemeClr val="tx1"/>
-                      </a:solidFill>
-                      <a:prstDash val="solid"/>
-                      <a:round/>
-                      <a:headEnd type="none" w="med" len="med"/>
-                      <a:tailEnd type="none" w="med" len="med"/>
-                    </a:lnL>
-                    <a:lnR w="12700" cap="flat" cmpd="sng" algn="ctr">
-                      <a:solidFill>
-                        <a:schemeClr val="tx1"/>
-                      </a:solidFill>
-                      <a:prstDash val="solid"/>
-                      <a:round/>
-                      <a:headEnd type="none" w="med" len="med"/>
-                      <a:tailEnd type="none" w="med" len="med"/>
-                    </a:lnR>
-                    <a:lnT w="12700" cap="flat" cmpd="sng" algn="ctr">
-                      <a:solidFill>
-                        <a:schemeClr val="tx1"/>
-                      </a:solidFill>
-                      <a:prstDash val="solid"/>
-                      <a:round/>
-                      <a:headEnd type="none" w="med" len="med"/>
-                      <a:tailEnd type="none" w="med" len="med"/>
-                    </a:lnT>
-                    <a:lnB w="12700" cap="flat" cmpd="sng" algn="ctr">
-                      <a:solidFill>
-                        <a:schemeClr val="tx1"/>
-                      </a:solidFill>
-                      <a:prstDash val="solid"/>
-                      <a:round/>
-                      <a:headEnd type="none" w="med" len="med"/>
-                      <a:tailEnd type="none" w="med" len="med"/>
-                    </a:lnB>
-                    <a:solidFill>
-                      <a:schemeClr val="bg1"/>
-                    </a:solidFill>
-                  </a:tcPr>
-                </a:tc>
-                <a:tc>
-                  <a:txBody>
-                    <a:bodyPr/>
-                    <a:lstStyle/>
-                    <a:p>
-                      <a:pPr algn="l" latinLnBrk="1"/>
-                      <a:r>
-                        <a:rPr lang="ko-KR" altLang="en-US" sz="1200"/>
-                        <a:t>운동과 흡연 여부 확인</a:t>
-                      </a:r>
-                    </a:p>
-                  </a:txBody>
-                  <a:tcPr anchor="ctr">
-                    <a:lnL w="12700" cap="flat" cmpd="sng" algn="ctr">
-                      <a:solidFill>
-                        <a:schemeClr val="tx1"/>
-                      </a:solidFill>
-                      <a:prstDash val="solid"/>
-                      <a:round/>
-                      <a:headEnd type="none" w="med" len="med"/>
-                      <a:tailEnd type="none" w="med" len="med"/>
-                    </a:lnL>
-                    <a:lnR w="12700" cap="flat" cmpd="sng" algn="ctr">
-                      <a:solidFill>
-                        <a:schemeClr val="tx1"/>
-                      </a:solidFill>
-                      <a:prstDash val="solid"/>
-                      <a:round/>
-                      <a:headEnd type="none" w="med" len="med"/>
-                      <a:tailEnd type="none" w="med" len="med"/>
-                    </a:lnR>
-                    <a:lnT w="12700" cap="flat" cmpd="sng" algn="ctr">
-                      <a:solidFill>
-                        <a:schemeClr val="tx1"/>
-                      </a:solidFill>
-                      <a:prstDash val="solid"/>
-                      <a:round/>
-                      <a:headEnd type="none" w="med" len="med"/>
-                      <a:tailEnd type="none" w="med" len="med"/>
-                    </a:lnT>
-                    <a:lnB w="12700" cap="flat" cmpd="sng" algn="ctr">
-                      <a:solidFill>
-                        <a:schemeClr val="tx1"/>
-                      </a:solidFill>
-                      <a:prstDash val="solid"/>
-                      <a:round/>
-                      <a:headEnd type="none" w="med" len="med"/>
-                      <a:tailEnd type="none" w="med" len="med"/>
-                    </a:lnB>
-                    <a:solidFill>
-                      <a:schemeClr val="bg1"/>
-                    </a:solidFill>
-                  </a:tcPr>
-                </a:tc>
-                <a:extLst>
-                  <a:ext uri="{0D108BD9-81ED-4DB2-BD59-A6C34878D82A}">
-                    <a16:rowId xmlns:a16="http://schemas.microsoft.com/office/drawing/2014/main" val="3718604235"/>
-                  </a:ext>
-                </a:extLst>
-              </a:tr>
-              <a:tr h="612000">
-                <a:tc>
-                  <a:txBody>
-                    <a:bodyPr/>
-                    <a:lstStyle/>
-                    <a:p>
-                      <a:pPr algn="ctr" latinLnBrk="1"/>
-                      <a:r>
-                        <a:rPr lang="en-US" altLang="ko-KR" sz="1200"/>
-                        <a:t>4</a:t>
-                      </a:r>
-                      <a:endParaRPr lang="ko-KR" altLang="en-US" sz="1200"/>
-                    </a:p>
-                  </a:txBody>
-                  <a:tcPr>
-                    <a:lnL w="12700" cap="flat" cmpd="sng" algn="ctr">
-                      <a:solidFill>
-                        <a:schemeClr val="tx1"/>
-                      </a:solidFill>
-                      <a:prstDash val="solid"/>
-                      <a:round/>
-                      <a:headEnd type="none" w="med" len="med"/>
-                      <a:tailEnd type="none" w="med" len="med"/>
-                    </a:lnL>
-                    <a:lnR w="12700" cap="flat" cmpd="sng" algn="ctr">
-                      <a:solidFill>
-                        <a:schemeClr val="tx1"/>
-                      </a:solidFill>
-                      <a:prstDash val="solid"/>
-                      <a:round/>
-                      <a:headEnd type="none" w="med" len="med"/>
-                      <a:tailEnd type="none" w="med" len="med"/>
-                    </a:lnR>
-                    <a:lnT w="12700" cap="flat" cmpd="sng" algn="ctr">
-                      <a:solidFill>
-                        <a:schemeClr val="tx1"/>
-                      </a:solidFill>
-                      <a:prstDash val="solid"/>
-                      <a:round/>
-                      <a:headEnd type="none" w="med" len="med"/>
-                      <a:tailEnd type="none" w="med" len="med"/>
-                    </a:lnT>
-                    <a:lnB w="12700" cap="flat" cmpd="sng" algn="ctr">
-                      <a:solidFill>
-                        <a:schemeClr val="tx1"/>
-                      </a:solidFill>
-                      <a:prstDash val="solid"/>
-                      <a:round/>
-                      <a:headEnd type="none" w="med" len="med"/>
-                      <a:tailEnd type="none" w="med" len="med"/>
-                    </a:lnB>
-                    <a:solidFill>
-                      <a:schemeClr val="bg1"/>
-                    </a:solidFill>
-                  </a:tcPr>
-                </a:tc>
-                <a:tc>
-                  <a:txBody>
-                    <a:bodyPr/>
-                    <a:lstStyle/>
-                    <a:p>
-                      <a:pPr algn="l" latinLnBrk="1"/>
-                      <a:r>
-                        <a:rPr lang="ko-KR" altLang="en-US" sz="1200"/>
-                        <a:t>입력한 정보에 대한 분석 결과 페이지로 이동</a:t>
-                      </a:r>
-                    </a:p>
-                  </a:txBody>
-                  <a:tcPr anchor="ctr">
-                    <a:lnL w="12700" cap="flat" cmpd="sng" algn="ctr">
-                      <a:solidFill>
-                        <a:schemeClr val="tx1"/>
-                      </a:solidFill>
-                      <a:prstDash val="solid"/>
-                      <a:round/>
-                      <a:headEnd type="none" w="med" len="med"/>
-                      <a:tailEnd type="none" w="med" len="med"/>
-                    </a:lnL>
-                    <a:lnR w="12700" cap="flat" cmpd="sng" algn="ctr">
-                      <a:solidFill>
-                        <a:schemeClr val="tx1"/>
-                      </a:solidFill>
-                      <a:prstDash val="solid"/>
-                      <a:round/>
-                      <a:headEnd type="none" w="med" len="med"/>
-                      <a:tailEnd type="none" w="med" len="med"/>
-                    </a:lnR>
-                    <a:lnT w="12700" cap="flat" cmpd="sng" algn="ctr">
-                      <a:solidFill>
-                        <a:schemeClr val="tx1"/>
-                      </a:solidFill>
-                      <a:prstDash val="solid"/>
-                      <a:round/>
-                      <a:headEnd type="none" w="med" len="med"/>
-                      <a:tailEnd type="none" w="med" len="med"/>
-                    </a:lnT>
-                    <a:lnB w="12700" cap="flat" cmpd="sng" algn="ctr">
-                      <a:solidFill>
-                        <a:schemeClr val="tx1"/>
-                      </a:solidFill>
-                      <a:prstDash val="solid"/>
-                      <a:round/>
-                      <a:headEnd type="none" w="med" len="med"/>
-                      <a:tailEnd type="none" w="med" len="med"/>
-                    </a:lnB>
-                    <a:solidFill>
-                      <a:schemeClr val="bg1"/>
-                    </a:solidFill>
-                  </a:tcPr>
-                </a:tc>
-                <a:extLst>
-                  <a:ext uri="{0D108BD9-81ED-4DB2-BD59-A6C34878D82A}">
-                    <a16:rowId xmlns:a16="http://schemas.microsoft.com/office/drawing/2014/main" val="2755969263"/>
                   </a:ext>
                 </a:extLst>
               </a:tr>
@@ -13913,7 +13415,7 @@
         </p:nvSpPr>
         <p:spPr>
           <a:xfrm>
-            <a:off x="380895" y="2748597"/>
+            <a:off x="427810" y="3002638"/>
             <a:ext cx="360000" cy="360000"/>
           </a:xfrm>
           <a:prstGeom prst="ellipse">
@@ -13960,10 +13462,10 @@
       </p:sp>
       <p:sp>
         <p:nvSpPr>
-          <p:cNvPr id="6" name="타원 5">
+          <p:cNvPr id="11" name="타원 10">
             <a:extLst>
               <a:ext uri="{FF2B5EF4-FFF2-40B4-BE49-F238E27FC236}">
-                <a16:creationId xmlns:a16="http://schemas.microsoft.com/office/drawing/2014/main" id="{36530CCA-5A69-2CF3-5C54-34468856DFB6}"/>
+                <a16:creationId xmlns:a16="http://schemas.microsoft.com/office/drawing/2014/main" id="{5A7938F5-4B55-388B-DCE1-EE52E3F66C75}"/>
               </a:ext>
             </a:extLst>
           </p:cNvPr>
@@ -13974,7 +13476,7 @@
         </p:nvSpPr>
         <p:spPr>
           <a:xfrm>
-            <a:off x="3249774" y="2748597"/>
+            <a:off x="7936818" y="3002638"/>
             <a:ext cx="360000" cy="360000"/>
           </a:xfrm>
           <a:prstGeom prst="ellipse">
@@ -14019,130 +13521,10 @@
           </a:p>
         </p:txBody>
       </p:sp>
-      <p:sp>
-        <p:nvSpPr>
-          <p:cNvPr id="7" name="타원 6">
-            <a:extLst>
-              <a:ext uri="{FF2B5EF4-FFF2-40B4-BE49-F238E27FC236}">
-                <a16:creationId xmlns:a16="http://schemas.microsoft.com/office/drawing/2014/main" id="{3194E283-4A82-FAAF-D7D6-6A6BB04817AF}"/>
-              </a:ext>
-            </a:extLst>
-          </p:cNvPr>
-          <p:cNvSpPr/>
-          <p:nvPr/>
-        </p:nvSpPr>
-        <p:spPr>
-          <a:xfrm>
-            <a:off x="6096000" y="2748597"/>
-            <a:ext cx="360000" cy="360000"/>
-          </a:xfrm>
-          <a:prstGeom prst="ellipse">
-            <a:avLst/>
-          </a:prstGeom>
-          <a:solidFill>
-            <a:srgbClr val="C00000">
-              <a:alpha val="60000"/>
-            </a:srgbClr>
-          </a:solidFill>
-        </p:spPr>
-        <p:style>
-          <a:lnRef idx="2">
-            <a:schemeClr val="accent1">
-              <a:shade val="15000"/>
-            </a:schemeClr>
-          </a:lnRef>
-          <a:fillRef idx="1">
-            <a:schemeClr val="accent1"/>
-          </a:fillRef>
-          <a:effectRef idx="0">
-            <a:schemeClr val="accent1"/>
-          </a:effectRef>
-          <a:fontRef idx="minor">
-            <a:schemeClr val="lt1"/>
-          </a:fontRef>
-        </p:style>
-        <p:txBody>
-          <a:bodyPr rtlCol="0" anchor="ctr"/>
-          <a:lstStyle/>
-          <a:p>
-            <a:pPr algn="ctr"/>
-            <a:r>
-              <a:rPr lang="en-US" altLang="ko-KR" sz="2000">
-                <a:latin typeface="+mn-ea"/>
-              </a:rPr>
-              <a:t>3</a:t>
-            </a:r>
-            <a:endParaRPr lang="ko-KR" altLang="en-US" sz="2000">
-              <a:latin typeface="+mn-ea"/>
-            </a:endParaRPr>
-          </a:p>
-        </p:txBody>
-      </p:sp>
-      <p:sp>
-        <p:nvSpPr>
-          <p:cNvPr id="8" name="타원 7">
-            <a:extLst>
-              <a:ext uri="{FF2B5EF4-FFF2-40B4-BE49-F238E27FC236}">
-                <a16:creationId xmlns:a16="http://schemas.microsoft.com/office/drawing/2014/main" id="{DD2E26A3-53FD-07AE-4CED-A337E917CD15}"/>
-              </a:ext>
-            </a:extLst>
-          </p:cNvPr>
-          <p:cNvSpPr>
-            <a:spLocks noChangeAspect="1"/>
-          </p:cNvSpPr>
-          <p:nvPr/>
-        </p:nvSpPr>
-        <p:spPr>
-          <a:xfrm>
-            <a:off x="3626056" y="5472112"/>
-            <a:ext cx="360000" cy="360000"/>
-          </a:xfrm>
-          <a:prstGeom prst="ellipse">
-            <a:avLst/>
-          </a:prstGeom>
-          <a:solidFill>
-            <a:srgbClr val="C00000">
-              <a:alpha val="60000"/>
-            </a:srgbClr>
-          </a:solidFill>
-        </p:spPr>
-        <p:style>
-          <a:lnRef idx="2">
-            <a:schemeClr val="accent1">
-              <a:shade val="15000"/>
-            </a:schemeClr>
-          </a:lnRef>
-          <a:fillRef idx="1">
-            <a:schemeClr val="accent1"/>
-          </a:fillRef>
-          <a:effectRef idx="0">
-            <a:schemeClr val="accent1"/>
-          </a:effectRef>
-          <a:fontRef idx="minor">
-            <a:schemeClr val="lt1"/>
-          </a:fontRef>
-        </p:style>
-        <p:txBody>
-          <a:bodyPr rtlCol="0" anchor="ctr"/>
-          <a:lstStyle/>
-          <a:p>
-            <a:pPr algn="ctr"/>
-            <a:r>
-              <a:rPr lang="en-US" altLang="ko-KR" sz="2000">
-                <a:latin typeface="+mn-ea"/>
-              </a:rPr>
-              <a:t>4</a:t>
-            </a:r>
-            <a:endParaRPr lang="ko-KR" altLang="en-US" sz="2000">
-              <a:latin typeface="+mn-ea"/>
-            </a:endParaRPr>
-          </a:p>
-        </p:txBody>
-      </p:sp>
     </p:spTree>
     <p:extLst>
       <p:ext uri="{BB962C8B-B14F-4D97-AF65-F5344CB8AC3E}">
-        <p14:creationId xmlns:p14="http://schemas.microsoft.com/office/powerpoint/2010/main" val="1040969425"/>
+        <p14:creationId xmlns:p14="http://schemas.microsoft.com/office/powerpoint/2010/main" val="2324931337"/>
       </p:ext>
     </p:extLst>
   </p:cSld>

--- a/1차 프로젝트/기획/기획서.pptx
+++ b/1차 프로젝트/기획/기획서.pptx
@@ -3446,8 +3446,8 @@
         </p:nvSpPr>
         <p:spPr>
           <a:xfrm>
-            <a:off x="3624039" y="1462917"/>
-            <a:ext cx="4943918" cy="1277604"/>
+            <a:off x="3624039" y="1145969"/>
+            <a:ext cx="4943918" cy="1689555"/>
           </a:xfrm>
         </p:spPr>
         <p:txBody>
@@ -3458,11 +3458,11 @@
           <a:p>
             <a:pPr algn="ctr" latinLnBrk="0">
               <a:lnSpc>
-                <a:spcPct val="100000"/>
+                <a:spcPct val="150000"/>
               </a:lnSpc>
             </a:pPr>
             <a:r>
-              <a:rPr lang="ko-KR" altLang="en-US" sz="2000" b="1" i="0" dirty="0">
+              <a:rPr lang="ko-KR" altLang="en-US" sz="2400" b="1" i="0" dirty="0">
                 <a:solidFill>
                   <a:schemeClr val="bg1"/>
                 </a:solidFill>
@@ -3472,7 +3472,7 @@
               <a:t>영양소 섭취 기반 </a:t>
             </a:r>
             <a:r>
-              <a:rPr lang="ko-KR" altLang="en-US" sz="2000" b="1" i="0" dirty="0" err="1">
+              <a:rPr lang="ko-KR" altLang="en-US" sz="2400" b="1" i="0" dirty="0" err="1">
                 <a:solidFill>
                   <a:schemeClr val="bg1"/>
                 </a:solidFill>
@@ -3482,7 +3482,7 @@
               <a:t>고콜레스테롤혈증</a:t>
             </a:r>
             <a:r>
-              <a:rPr lang="ko-KR" altLang="en-US" sz="2000" b="1" i="0" dirty="0">
+              <a:rPr lang="ko-KR" altLang="en-US" sz="2400" b="1" i="0" dirty="0">
                 <a:solidFill>
                   <a:schemeClr val="bg1"/>
                 </a:solidFill>
@@ -3492,7 +3492,7 @@
               <a:t> 위험도 예측 및</a:t>
             </a:r>
             <a:br>
-              <a:rPr lang="ko-KR" altLang="en-US" sz="2000" b="1" i="0" dirty="0">
+              <a:rPr lang="ko-KR" altLang="en-US" sz="2400" b="1" i="0" dirty="0">
                 <a:solidFill>
                   <a:schemeClr val="bg1"/>
                 </a:solidFill>
@@ -3501,7 +3501,7 @@
               </a:rPr>
             </a:br>
             <a:r>
-              <a:rPr lang="ko-KR" altLang="en-US" sz="2000" b="1" i="0" dirty="0">
+              <a:rPr lang="ko-KR" altLang="en-US" sz="2400" b="1" i="0" dirty="0">
                 <a:solidFill>
                   <a:schemeClr val="bg1"/>
                 </a:solidFill>
@@ -3759,8 +3759,8 @@
               <a:rPr lang="ko-KR" altLang="en-US" sz="1600" b="1" i="0">
                 <a:solidFill>
                   <a:schemeClr val="tx1">
-                    <a:lumMod val="75000"/>
-                    <a:lumOff val="25000"/>
+                    <a:lumMod val="95000"/>
+                    <a:lumOff val="5000"/>
                   </a:schemeClr>
                 </a:solidFill>
                 <a:effectLst/>
@@ -3772,8 +3772,8 @@
               <a:rPr lang="en-US" altLang="ko-KR" sz="1600" b="1" i="0">
                 <a:solidFill>
                   <a:schemeClr val="tx1">
-                    <a:lumMod val="75000"/>
-                    <a:lumOff val="25000"/>
+                    <a:lumMod val="95000"/>
+                    <a:lumOff val="5000"/>
                   </a:schemeClr>
                 </a:solidFill>
                 <a:effectLst/>
@@ -3785,8 +3785,8 @@
               <a:rPr lang="ko-KR" altLang="en-US" sz="1600" b="1" i="0">
                 <a:solidFill>
                   <a:schemeClr val="tx1">
-                    <a:lumMod val="75000"/>
-                    <a:lumOff val="25000"/>
+                    <a:lumMod val="95000"/>
+                    <a:lumOff val="5000"/>
                   </a:schemeClr>
                 </a:solidFill>
                 <a:effectLst/>
@@ -3798,8 +3798,8 @@
               <a:rPr lang="en-US" altLang="ko-KR" sz="1600" b="1" i="0">
                 <a:solidFill>
                   <a:schemeClr val="tx1">
-                    <a:lumMod val="75000"/>
-                    <a:lumOff val="25000"/>
+                    <a:lumMod val="95000"/>
+                    <a:lumOff val="5000"/>
                   </a:schemeClr>
                 </a:solidFill>
                 <a:effectLst/>
@@ -3811,8 +3811,8 @@
               <a:rPr lang="ko-KR" altLang="en-US" sz="1600" b="1" i="0">
                 <a:solidFill>
                   <a:schemeClr val="tx1">
-                    <a:lumMod val="75000"/>
-                    <a:lumOff val="25000"/>
+                    <a:lumMod val="95000"/>
+                    <a:lumOff val="5000"/>
                   </a:schemeClr>
                 </a:solidFill>
                 <a:effectLst/>
@@ -3823,8 +3823,8 @@
             <a:endParaRPr lang="ko-KR" altLang="en-US" sz="1400" b="1" dirty="0">
               <a:solidFill>
                 <a:schemeClr val="tx1">
-                  <a:lumMod val="75000"/>
-                  <a:lumOff val="25000"/>
+                  <a:lumMod val="95000"/>
+                  <a:lumOff val="5000"/>
                 </a:schemeClr>
               </a:solidFill>
             </a:endParaRPr>
@@ -4062,11 +4062,24 @@
             </a:pPr>
             <a:r>
               <a:rPr lang="ko-KR" altLang="en-US" sz="1600" b="1">
+                <a:solidFill>
+                  <a:schemeClr val="tx1">
+                    <a:lumMod val="95000"/>
+                    <a:lumOff val="5000"/>
+                  </a:schemeClr>
+                </a:solidFill>
                 <a:latin typeface="Noto Sans KR"/>
               </a:rPr>
               <a:t>고콜레스테롤혈증 만성질환 유병률 증가</a:t>
             </a:r>
-            <a:endParaRPr lang="ko-KR" altLang="en-US" sz="1400" b="1" dirty="0"/>
+            <a:endParaRPr lang="ko-KR" altLang="en-US" sz="1400" b="1" dirty="0">
+              <a:solidFill>
+                <a:schemeClr val="tx1">
+                  <a:lumMod val="95000"/>
+                  <a:lumOff val="5000"/>
+                </a:schemeClr>
+              </a:solidFill>
+            </a:endParaRPr>
           </a:p>
         </p:txBody>
       </p:sp>
@@ -4627,8 +4640,8 @@
               <a:rPr lang="ko-KR" altLang="en-US" sz="1600" b="1">
                 <a:solidFill>
                   <a:schemeClr val="tx1">
-                    <a:lumMod val="75000"/>
-                    <a:lumOff val="25000"/>
+                    <a:lumMod val="85000"/>
+                    <a:lumOff val="15000"/>
                   </a:schemeClr>
                 </a:solidFill>
               </a:rPr>
@@ -4637,8 +4650,8 @@
             <a:endParaRPr lang="ko-KR" altLang="en-US" sz="1600" b="1" dirty="0">
               <a:solidFill>
                 <a:schemeClr val="tx1">
-                  <a:lumMod val="75000"/>
-                  <a:lumOff val="25000"/>
+                  <a:lumMod val="85000"/>
+                  <a:lumOff val="15000"/>
                 </a:schemeClr>
               </a:solidFill>
             </a:endParaRPr>
@@ -4927,11 +4940,23 @@
             </a:pPr>
             <a:r>
               <a:rPr lang="ko-KR" altLang="en-US" sz="1600" b="1">
+                <a:solidFill>
+                  <a:schemeClr val="tx1">
+                    <a:lumMod val="85000"/>
+                    <a:lumOff val="15000"/>
+                  </a:schemeClr>
+                </a:solidFill>
                 <a:latin typeface="Noto Sans KR"/>
               </a:rPr>
               <a:t>개인별 맞춤 관리 가이드 필요</a:t>
             </a:r>
             <a:endParaRPr lang="en-US" altLang="ko-KR" sz="1600" b="1">
+              <a:solidFill>
+                <a:schemeClr val="tx1">
+                  <a:lumMod val="85000"/>
+                  <a:lumOff val="15000"/>
+                </a:schemeClr>
+              </a:solidFill>
               <a:latin typeface="Noto Sans KR"/>
             </a:endParaRPr>
           </a:p>
@@ -7617,11 +7642,17 @@
           <p:cNvGraphicFramePr>
             <a:graphicFrameLocks noGrp="1"/>
           </p:cNvGraphicFramePr>
-          <p:nvPr/>
+          <p:nvPr>
+            <p:extLst>
+              <p:ext uri="{D42A27DB-BD31-4B8C-83A1-F6EECF244321}">
+                <p14:modId xmlns:p14="http://schemas.microsoft.com/office/powerpoint/2010/main" val="2658271241"/>
+              </p:ext>
+            </p:extLst>
+          </p:nvPr>
         </p:nvGraphicFramePr>
         <p:xfrm>
           <a:off x="9221188" y="826547"/>
-          <a:ext cx="2607296" cy="2808000"/>
+          <a:ext cx="2607296" cy="3780000"/>
         </p:xfrm>
         <a:graphic>
           <a:graphicData uri="http://schemas.openxmlformats.org/drawingml/2006/table">
@@ -8205,6 +8236,260 @@
                 <a:extLst>
                   <a:ext uri="{0D108BD9-81ED-4DB2-BD59-A6C34878D82A}">
                     <a16:rowId xmlns:a16="http://schemas.microsoft.com/office/drawing/2014/main" val="2755969263"/>
+                  </a:ext>
+                </a:extLst>
+              </a:tr>
+              <a:tr h="360000">
+                <a:tc gridSpan="2">
+                  <a:txBody>
+                    <a:bodyPr/>
+                    <a:lstStyle/>
+                    <a:p>
+                      <a:pPr marL="0" marR="0" lvl="0" indent="0" algn="ctr" defTabSz="914400" rtl="0" eaLnBrk="1" fontAlgn="auto" latinLnBrk="1" hangingPunct="1">
+                        <a:lnSpc>
+                          <a:spcPct val="100000"/>
+                        </a:lnSpc>
+                        <a:spcBef>
+                          <a:spcPts val="0"/>
+                        </a:spcBef>
+                        <a:spcAft>
+                          <a:spcPts val="0"/>
+                        </a:spcAft>
+                        <a:buClrTx/>
+                        <a:buSzTx/>
+                        <a:buFontTx/>
+                        <a:buNone/>
+                        <a:tabLst/>
+                        <a:defRPr/>
+                      </a:pPr>
+                      <a:r>
+                        <a:rPr lang="en-US" altLang="ko-KR" sz="1200"/>
+                        <a:t>Check Point</a:t>
+                      </a:r>
+                    </a:p>
+                  </a:txBody>
+                  <a:tcPr anchor="ctr">
+                    <a:lnL w="12700" cap="flat" cmpd="sng" algn="ctr">
+                      <a:solidFill>
+                        <a:schemeClr val="tx1"/>
+                      </a:solidFill>
+                      <a:prstDash val="solid"/>
+                      <a:round/>
+                      <a:headEnd type="none" w="med" len="med"/>
+                      <a:tailEnd type="none" w="med" len="med"/>
+                    </a:lnL>
+                    <a:lnR w="12700" cap="flat" cmpd="sng" algn="ctr">
+                      <a:solidFill>
+                        <a:schemeClr val="tx1"/>
+                      </a:solidFill>
+                      <a:prstDash val="solid"/>
+                      <a:round/>
+                      <a:headEnd type="none" w="med" len="med"/>
+                      <a:tailEnd type="none" w="med" len="med"/>
+                    </a:lnR>
+                    <a:lnT w="12700" cap="flat" cmpd="sng" algn="ctr">
+                      <a:solidFill>
+                        <a:schemeClr val="tx1"/>
+                      </a:solidFill>
+                      <a:prstDash val="solid"/>
+                      <a:round/>
+                      <a:headEnd type="none" w="med" len="med"/>
+                      <a:tailEnd type="none" w="med" len="med"/>
+                    </a:lnT>
+                    <a:lnB w="12700" cap="flat" cmpd="sng" algn="ctr">
+                      <a:solidFill>
+                        <a:schemeClr val="tx1"/>
+                      </a:solidFill>
+                      <a:prstDash val="solid"/>
+                      <a:round/>
+                      <a:headEnd type="none" w="med" len="med"/>
+                      <a:tailEnd type="none" w="med" len="med"/>
+                    </a:lnB>
+                    <a:solidFill>
+                      <a:schemeClr val="bg1">
+                        <a:lumMod val="85000"/>
+                      </a:schemeClr>
+                    </a:solidFill>
+                  </a:tcPr>
+                </a:tc>
+                <a:tc hMerge="1">
+                  <a:txBody>
+                    <a:bodyPr/>
+                    <a:lstStyle/>
+                    <a:p>
+                      <a:pPr algn="l" latinLnBrk="1"/>
+                      <a:endParaRPr lang="ko-KR" altLang="en-US" sz="1200"/>
+                    </a:p>
+                  </a:txBody>
+                  <a:tcPr anchor="ctr">
+                    <a:lnL w="12700" cap="flat" cmpd="sng" algn="ctr">
+                      <a:solidFill>
+                        <a:schemeClr val="tx1"/>
+                      </a:solidFill>
+                      <a:prstDash val="solid"/>
+                      <a:round/>
+                      <a:headEnd type="none" w="med" len="med"/>
+                      <a:tailEnd type="none" w="med" len="med"/>
+                    </a:lnL>
+                    <a:lnR w="12700" cap="flat" cmpd="sng" algn="ctr">
+                      <a:solidFill>
+                        <a:schemeClr val="tx1"/>
+                      </a:solidFill>
+                      <a:prstDash val="solid"/>
+                      <a:round/>
+                      <a:headEnd type="none" w="med" len="med"/>
+                      <a:tailEnd type="none" w="med" len="med"/>
+                    </a:lnR>
+                    <a:lnT w="12700" cap="flat" cmpd="sng" algn="ctr">
+                      <a:solidFill>
+                        <a:schemeClr val="tx1"/>
+                      </a:solidFill>
+                      <a:prstDash val="solid"/>
+                      <a:round/>
+                      <a:headEnd type="none" w="med" len="med"/>
+                      <a:tailEnd type="none" w="med" len="med"/>
+                    </a:lnT>
+                    <a:lnB w="12700" cap="flat" cmpd="sng" algn="ctr">
+                      <a:solidFill>
+                        <a:schemeClr val="tx1"/>
+                      </a:solidFill>
+                      <a:prstDash val="solid"/>
+                      <a:round/>
+                      <a:headEnd type="none" w="med" len="med"/>
+                      <a:tailEnd type="none" w="med" len="med"/>
+                    </a:lnB>
+                    <a:solidFill>
+                      <a:schemeClr val="bg1"/>
+                    </a:solidFill>
+                  </a:tcPr>
+                </a:tc>
+                <a:extLst>
+                  <a:ext uri="{0D108BD9-81ED-4DB2-BD59-A6C34878D82A}">
+                    <a16:rowId xmlns:a16="http://schemas.microsoft.com/office/drawing/2014/main" val="2275643079"/>
+                  </a:ext>
+                </a:extLst>
+              </a:tr>
+              <a:tr h="612000">
+                <a:tc gridSpan="2">
+                  <a:txBody>
+                    <a:bodyPr/>
+                    <a:lstStyle/>
+                    <a:p>
+                      <a:pPr algn="ctr" latinLnBrk="1"/>
+                      <a:r>
+                        <a:rPr lang="en-US" altLang="ko-KR" sz="1200"/>
+                        <a:t>‘</a:t>
+                      </a:r>
+                      <a:r>
+                        <a:rPr lang="ko-KR" altLang="en-US" sz="1200"/>
+                        <a:t>분석 결과 확인하기</a:t>
+                      </a:r>
+                      <a:r>
+                        <a:rPr lang="en-US" altLang="ko-KR" sz="1200"/>
+                        <a:t>’</a:t>
+                      </a:r>
+                      <a:r>
+                        <a:rPr lang="ko-KR" altLang="en-US" sz="1200"/>
+                        <a:t>를 눌러 입력 데이터에 대한 결과 페이지로 이동</a:t>
+                      </a:r>
+                    </a:p>
+                  </a:txBody>
+                  <a:tcPr>
+                    <a:lnL w="12700" cap="flat" cmpd="sng" algn="ctr">
+                      <a:solidFill>
+                        <a:schemeClr val="tx1"/>
+                      </a:solidFill>
+                      <a:prstDash val="solid"/>
+                      <a:round/>
+                      <a:headEnd type="none" w="med" len="med"/>
+                      <a:tailEnd type="none" w="med" len="med"/>
+                    </a:lnL>
+                    <a:lnR w="12700" cap="flat" cmpd="sng" algn="ctr">
+                      <a:solidFill>
+                        <a:schemeClr val="tx1"/>
+                      </a:solidFill>
+                      <a:prstDash val="solid"/>
+                      <a:round/>
+                      <a:headEnd type="none" w="med" len="med"/>
+                      <a:tailEnd type="none" w="med" len="med"/>
+                    </a:lnR>
+                    <a:lnT w="12700" cap="flat" cmpd="sng" algn="ctr">
+                      <a:solidFill>
+                        <a:schemeClr val="tx1"/>
+                      </a:solidFill>
+                      <a:prstDash val="solid"/>
+                      <a:round/>
+                      <a:headEnd type="none" w="med" len="med"/>
+                      <a:tailEnd type="none" w="med" len="med"/>
+                    </a:lnT>
+                    <a:lnB w="12700" cap="flat" cmpd="sng" algn="ctr">
+                      <a:solidFill>
+                        <a:schemeClr val="tx1"/>
+                      </a:solidFill>
+                      <a:prstDash val="solid"/>
+                      <a:round/>
+                      <a:headEnd type="none" w="med" len="med"/>
+                      <a:tailEnd type="none" w="med" len="med"/>
+                    </a:lnB>
+                    <a:solidFill>
+                      <a:schemeClr val="bg1"/>
+                    </a:solidFill>
+                  </a:tcPr>
+                </a:tc>
+                <a:tc hMerge="1">
+                  <a:txBody>
+                    <a:bodyPr/>
+                    <a:lstStyle/>
+                    <a:p>
+                      <a:pPr algn="l" latinLnBrk="1"/>
+                      <a:endParaRPr lang="ko-KR" altLang="en-US" sz="1200"/>
+                    </a:p>
+                  </a:txBody>
+                  <a:tcPr anchor="ctr">
+                    <a:lnL w="12700" cap="flat" cmpd="sng" algn="ctr">
+                      <a:solidFill>
+                        <a:schemeClr val="tx1"/>
+                      </a:solidFill>
+                      <a:prstDash val="solid"/>
+                      <a:round/>
+                      <a:headEnd type="none" w="med" len="med"/>
+                      <a:tailEnd type="none" w="med" len="med"/>
+                    </a:lnL>
+                    <a:lnR w="12700" cap="flat" cmpd="sng" algn="ctr">
+                      <a:solidFill>
+                        <a:schemeClr val="tx1"/>
+                      </a:solidFill>
+                      <a:prstDash val="solid"/>
+                      <a:round/>
+                      <a:headEnd type="none" w="med" len="med"/>
+                      <a:tailEnd type="none" w="med" len="med"/>
+                    </a:lnR>
+                    <a:lnT w="12700" cap="flat" cmpd="sng" algn="ctr">
+                      <a:solidFill>
+                        <a:schemeClr val="tx1"/>
+                      </a:solidFill>
+                      <a:prstDash val="solid"/>
+                      <a:round/>
+                      <a:headEnd type="none" w="med" len="med"/>
+                      <a:tailEnd type="none" w="med" len="med"/>
+                    </a:lnT>
+                    <a:lnB w="12700" cap="flat" cmpd="sng" algn="ctr">
+                      <a:solidFill>
+                        <a:schemeClr val="tx1"/>
+                      </a:solidFill>
+                      <a:prstDash val="solid"/>
+                      <a:round/>
+                      <a:headEnd type="none" w="med" len="med"/>
+                      <a:tailEnd type="none" w="med" len="med"/>
+                    </a:lnB>
+                    <a:solidFill>
+                      <a:schemeClr val="bg1"/>
+                    </a:solidFill>
+                  </a:tcPr>
+                </a:tc>
+                <a:extLst>
+                  <a:ext uri="{0D108BD9-81ED-4DB2-BD59-A6C34878D82A}">
+                    <a16:rowId xmlns:a16="http://schemas.microsoft.com/office/drawing/2014/main" val="1885486421"/>
                   </a:ext>
                 </a:extLst>
               </a:tr>

--- a/1차 프로젝트/기획/기획서.pptx
+++ b/1차 프로젝트/기획/기획서.pptx
@@ -5734,9 +5734,7 @@
             <a:r>
               <a:rPr lang="ko-KR" altLang="en-US" sz="1400" b="1">
                 <a:solidFill>
-                  <a:schemeClr val="bg1">
-                    <a:lumMod val="85000"/>
-                  </a:schemeClr>
+                  <a:schemeClr val="bg1"/>
                 </a:solidFill>
                 <a:latin typeface="+mn-ea"/>
               </a:rPr>
@@ -5745,9 +5743,7 @@
             <a:r>
               <a:rPr lang="en-US" altLang="ko-KR" sz="1400" b="1">
                 <a:solidFill>
-                  <a:schemeClr val="bg1">
-                    <a:lumMod val="85000"/>
-                  </a:schemeClr>
+                  <a:schemeClr val="bg1"/>
                 </a:solidFill>
                 <a:latin typeface="+mn-ea"/>
               </a:rPr>
@@ -5756,9 +5752,7 @@
             <a:r>
               <a:rPr lang="ko-KR" altLang="en-US" sz="1400" b="1">
                 <a:solidFill>
-                  <a:schemeClr val="bg1">
-                    <a:lumMod val="85000"/>
-                  </a:schemeClr>
+                  <a:schemeClr val="bg1"/>
                 </a:solidFill>
                 <a:latin typeface="+mn-ea"/>
               </a:rPr>
@@ -5828,9 +5822,7 @@
             <a:r>
               <a:rPr lang="ko-KR" altLang="en-US" sz="1400" b="1">
                 <a:solidFill>
-                  <a:schemeClr val="bg1">
-                    <a:lumMod val="85000"/>
-                  </a:schemeClr>
+                  <a:schemeClr val="bg1"/>
                 </a:solidFill>
                 <a:latin typeface="+mn-ea"/>
               </a:rPr>
@@ -5838,9 +5830,7 @@
             </a:r>
             <a:endParaRPr lang="en-US" altLang="ko-KR" sz="1400" b="1">
               <a:solidFill>
-                <a:schemeClr val="bg1">
-                  <a:lumMod val="85000"/>
-                </a:schemeClr>
+                <a:schemeClr val="bg1"/>
               </a:solidFill>
               <a:latin typeface="+mn-ea"/>
             </a:endParaRPr>
@@ -6032,9 +6022,7 @@
             <a:r>
               <a:rPr lang="ko-KR" altLang="en-US" sz="1400" b="1">
                 <a:solidFill>
-                  <a:schemeClr val="bg1">
-                    <a:lumMod val="85000"/>
-                  </a:schemeClr>
+                  <a:schemeClr val="bg1"/>
                 </a:solidFill>
                 <a:latin typeface="+mn-ea"/>
               </a:rPr>
@@ -6043,9 +6031,7 @@
             <a:r>
               <a:rPr lang="en-US" altLang="ko-KR" sz="1400" b="1">
                 <a:solidFill>
-                  <a:schemeClr val="bg1">
-                    <a:lumMod val="85000"/>
-                  </a:schemeClr>
+                  <a:schemeClr val="bg1"/>
                 </a:solidFill>
                 <a:latin typeface="+mn-ea"/>
               </a:rPr>
@@ -6054,9 +6040,7 @@
             <a:r>
               <a:rPr lang="ko-KR" altLang="en-US" sz="1400" b="1">
                 <a:solidFill>
-                  <a:schemeClr val="bg1">
-                    <a:lumMod val="85000"/>
-                  </a:schemeClr>
+                  <a:schemeClr val="bg1"/>
                 </a:solidFill>
                 <a:latin typeface="+mn-ea"/>
               </a:rPr>
@@ -6118,9 +6102,7 @@
             <a:r>
               <a:rPr lang="ko-KR" altLang="en-US" sz="1400" b="1">
                 <a:solidFill>
-                  <a:schemeClr val="bg1">
-                    <a:lumMod val="85000"/>
-                  </a:schemeClr>
+                  <a:schemeClr val="bg1"/>
                 </a:solidFill>
                 <a:latin typeface="+mn-ea"/>
               </a:rPr>
@@ -6129,9 +6111,7 @@
             <a:r>
               <a:rPr lang="en-US" altLang="ko-KR" sz="1400" b="1">
                 <a:solidFill>
-                  <a:schemeClr val="bg1">
-                    <a:lumMod val="85000"/>
-                  </a:schemeClr>
+                  <a:schemeClr val="bg1"/>
                 </a:solidFill>
                 <a:latin typeface="+mn-ea"/>
               </a:rPr>
@@ -6311,13 +6291,22 @@
             <a:r>
               <a:rPr lang="ko-KR" altLang="en-US" sz="1400" b="1">
                 <a:solidFill>
+                  <a:schemeClr val="bg1"/>
+                </a:solidFill>
+                <a:latin typeface="+mn-ea"/>
+              </a:rPr>
+              <a:t>상관관계</a:t>
+            </a:r>
+            <a:r>
+              <a:rPr lang="ko-KR" altLang="en-US" sz="1400" b="1">
+                <a:solidFill>
                   <a:schemeClr val="bg1">
                     <a:lumMod val="85000"/>
                   </a:schemeClr>
                 </a:solidFill>
                 <a:latin typeface="+mn-ea"/>
               </a:rPr>
-              <a:t>상관관계 </a:t>
+              <a:t> </a:t>
             </a:r>
             <a:r>
               <a:rPr lang="ko-KR" altLang="en-US" sz="1400">

--- a/1차 프로젝트/기획/기획서.pptx
+++ b/1차 프로젝트/기획/기획서.pptx
@@ -5666,9 +5666,7 @@
             <a:r>
               <a:rPr lang="ko-KR" altLang="en-US" sz="1800" b="1">
                 <a:solidFill>
-                  <a:schemeClr val="bg1">
-                    <a:lumMod val="95000"/>
-                  </a:schemeClr>
+                  <a:schemeClr val="bg1"/>
                 </a:solidFill>
                 <a:latin typeface="Noto Sans KR"/>
               </a:rPr>
@@ -5676,9 +5674,7 @@
             </a:r>
             <a:endParaRPr lang="en-US" altLang="ko-KR" sz="1800" b="1">
               <a:solidFill>
-                <a:schemeClr val="bg1">
-                  <a:lumMod val="95000"/>
-                </a:schemeClr>
+                <a:schemeClr val="bg1"/>
               </a:solidFill>
               <a:latin typeface="Noto Sans KR"/>
             </a:endParaRPr>
@@ -6358,9 +6354,7 @@
             <a:r>
               <a:rPr lang="ko-KR" altLang="en-US" b="1">
                 <a:solidFill>
-                  <a:schemeClr val="bg1">
-                    <a:lumMod val="95000"/>
-                  </a:schemeClr>
+                  <a:schemeClr val="bg1"/>
                 </a:solidFill>
                 <a:latin typeface="Noto Sans KR"/>
               </a:rPr>
@@ -6368,9 +6362,7 @@
             </a:r>
             <a:endParaRPr lang="ko-KR" altLang="en-US" b="1">
               <a:solidFill>
-                <a:schemeClr val="bg1">
-                  <a:lumMod val="95000"/>
-                </a:schemeClr>
+                <a:schemeClr val="bg1"/>
               </a:solidFill>
             </a:endParaRPr>
           </a:p>

--- a/1차 프로젝트/기획/기획서.pptx
+++ b/1차 프로젝트/기획/기획서.pptx
@@ -4260,7 +4260,7 @@
         </p:nvCxnSpPr>
         <p:spPr>
           <a:xfrm>
-            <a:off x="4874400" y="1915525"/>
+            <a:off x="5224723" y="1915525"/>
             <a:ext cx="0" cy="4273580"/>
           </a:xfrm>
           <a:prstGeom prst="line">
@@ -5076,52 +5076,6 @@
           </a:p>
         </p:txBody>
       </p:sp>
-      <p:cxnSp>
-        <p:nvCxnSpPr>
-          <p:cNvPr id="16" name="직선 연결선 15">
-            <a:extLst>
-              <a:ext uri="{FF2B5EF4-FFF2-40B4-BE49-F238E27FC236}">
-                <a16:creationId xmlns:a16="http://schemas.microsoft.com/office/drawing/2014/main" id="{8ED8B41D-99E1-876D-2BFC-742037A8D708}"/>
-              </a:ext>
-            </a:extLst>
-          </p:cNvPr>
-          <p:cNvCxnSpPr>
-            <a:cxnSpLocks/>
-          </p:cNvCxnSpPr>
-          <p:nvPr/>
-        </p:nvCxnSpPr>
-        <p:spPr>
-          <a:xfrm>
-            <a:off x="4874400" y="1915525"/>
-            <a:ext cx="0" cy="4273580"/>
-          </a:xfrm>
-          <a:prstGeom prst="line">
-            <a:avLst/>
-          </a:prstGeom>
-          <a:ln>
-            <a:solidFill>
-              <a:schemeClr val="tx1">
-                <a:lumMod val="75000"/>
-                <a:lumOff val="25000"/>
-              </a:schemeClr>
-            </a:solidFill>
-          </a:ln>
-        </p:spPr>
-        <p:style>
-          <a:lnRef idx="2">
-            <a:schemeClr val="dk1"/>
-          </a:lnRef>
-          <a:fillRef idx="0">
-            <a:schemeClr val="dk1"/>
-          </a:fillRef>
-          <a:effectRef idx="1">
-            <a:schemeClr val="dk1"/>
-          </a:effectRef>
-          <a:fontRef idx="minor">
-            <a:schemeClr val="tx1"/>
-          </a:fontRef>
-        </p:style>
-      </p:cxnSp>
       <p:pic>
         <p:nvPicPr>
           <p:cNvPr id="10" name="그림 9" descr="텍스트, 폰트, 스크린샷, 화이트이(가) 표시된 사진&#10;&#10;AI가 생성한 콘텐츠는 부정확할 수 있습니다.">
@@ -5277,6 +5231,52 @@
           </a:extLst>
         </p:spPr>
       </p:pic>
+      <p:cxnSp>
+        <p:nvCxnSpPr>
+          <p:cNvPr id="6" name="직선 연결선 5">
+            <a:extLst>
+              <a:ext uri="{FF2B5EF4-FFF2-40B4-BE49-F238E27FC236}">
+                <a16:creationId xmlns:a16="http://schemas.microsoft.com/office/drawing/2014/main" id="{F3A5A2F4-C1FC-C543-BAF6-59AAAC1AE9C8}"/>
+              </a:ext>
+            </a:extLst>
+          </p:cNvPr>
+          <p:cNvCxnSpPr>
+            <a:cxnSpLocks/>
+          </p:cNvCxnSpPr>
+          <p:nvPr/>
+        </p:nvCxnSpPr>
+        <p:spPr>
+          <a:xfrm>
+            <a:off x="5224723" y="1915525"/>
+            <a:ext cx="0" cy="4273580"/>
+          </a:xfrm>
+          <a:prstGeom prst="line">
+            <a:avLst/>
+          </a:prstGeom>
+          <a:ln>
+            <a:solidFill>
+              <a:schemeClr val="tx1">
+                <a:lumMod val="75000"/>
+                <a:lumOff val="25000"/>
+              </a:schemeClr>
+            </a:solidFill>
+          </a:ln>
+        </p:spPr>
+        <p:style>
+          <a:lnRef idx="2">
+            <a:schemeClr val="dk1"/>
+          </a:lnRef>
+          <a:fillRef idx="0">
+            <a:schemeClr val="dk1"/>
+          </a:fillRef>
+          <a:effectRef idx="1">
+            <a:schemeClr val="dk1"/>
+          </a:effectRef>
+          <a:fontRef idx="minor">
+            <a:schemeClr val="tx1"/>
+          </a:fontRef>
+        </p:style>
+      </p:cxnSp>
     </p:spTree>
     <p:extLst>
       <p:ext uri="{BB962C8B-B14F-4D97-AF65-F5344CB8AC3E}">

--- a/1차 프로젝트/기획/기획서.pptx
+++ b/1차 프로젝트/기획/기획서.pptx
@@ -244,7 +244,7 @@
           <a:p>
             <a:fld id="{C29A2857-52EE-4322-B040-F7AE6E3FFBF0}" type="datetimeFigureOut">
               <a:rPr lang="ko-KR" altLang="en-US" smtClean="0"/>
-              <a:t>2026-03-27</a:t>
+              <a:t>03-29(Sun)</a:t>
             </a:fld>
             <a:endParaRPr lang="ko-KR" altLang="en-US"/>
           </a:p>
@@ -642,7 +642,7 @@
           <a:p>
             <a:fld id="{D71FF700-8BFB-4C30-A2B6-F509E51DF773}" type="datetimeFigureOut">
               <a:rPr lang="ko-KR" altLang="en-US" smtClean="0"/>
-              <a:t>2026-03-27</a:t>
+              <a:t>03-29(Sun)</a:t>
             </a:fld>
             <a:endParaRPr lang="ko-KR" altLang="en-US"/>
           </a:p>
@@ -812,7 +812,7 @@
           <a:p>
             <a:fld id="{D71FF700-8BFB-4C30-A2B6-F509E51DF773}" type="datetimeFigureOut">
               <a:rPr lang="ko-KR" altLang="en-US" smtClean="0"/>
-              <a:t>2026-03-27</a:t>
+              <a:t>03-29(Sun)</a:t>
             </a:fld>
             <a:endParaRPr lang="ko-KR" altLang="en-US"/>
           </a:p>
@@ -992,7 +992,7 @@
           <a:p>
             <a:fld id="{D71FF700-8BFB-4C30-A2B6-F509E51DF773}" type="datetimeFigureOut">
               <a:rPr lang="ko-KR" altLang="en-US" smtClean="0"/>
-              <a:t>2026-03-27</a:t>
+              <a:t>03-29(Sun)</a:t>
             </a:fld>
             <a:endParaRPr lang="ko-KR" altLang="en-US"/>
           </a:p>
@@ -1162,7 +1162,7 @@
           <a:p>
             <a:fld id="{D71FF700-8BFB-4C30-A2B6-F509E51DF773}" type="datetimeFigureOut">
               <a:rPr lang="ko-KR" altLang="en-US" smtClean="0"/>
-              <a:t>2026-03-27</a:t>
+              <a:t>03-29(Sun)</a:t>
             </a:fld>
             <a:endParaRPr lang="ko-KR" altLang="en-US"/>
           </a:p>
@@ -1408,7 +1408,7 @@
           <a:p>
             <a:fld id="{D71FF700-8BFB-4C30-A2B6-F509E51DF773}" type="datetimeFigureOut">
               <a:rPr lang="ko-KR" altLang="en-US" smtClean="0"/>
-              <a:t>2026-03-27</a:t>
+              <a:t>03-29(Sun)</a:t>
             </a:fld>
             <a:endParaRPr lang="ko-KR" altLang="en-US"/>
           </a:p>
@@ -1640,7 +1640,7 @@
           <a:p>
             <a:fld id="{D71FF700-8BFB-4C30-A2B6-F509E51DF773}" type="datetimeFigureOut">
               <a:rPr lang="ko-KR" altLang="en-US" smtClean="0"/>
-              <a:t>2026-03-27</a:t>
+              <a:t>03-29(Sun)</a:t>
             </a:fld>
             <a:endParaRPr lang="ko-KR" altLang="en-US"/>
           </a:p>
@@ -2007,7 +2007,7 @@
           <a:p>
             <a:fld id="{D71FF700-8BFB-4C30-A2B6-F509E51DF773}" type="datetimeFigureOut">
               <a:rPr lang="ko-KR" altLang="en-US" smtClean="0"/>
-              <a:t>2026-03-27</a:t>
+              <a:t>03-29(Sun)</a:t>
             </a:fld>
             <a:endParaRPr lang="ko-KR" altLang="en-US"/>
           </a:p>
@@ -2125,7 +2125,7 @@
           <a:p>
             <a:fld id="{D71FF700-8BFB-4C30-A2B6-F509E51DF773}" type="datetimeFigureOut">
               <a:rPr lang="ko-KR" altLang="en-US" smtClean="0"/>
-              <a:t>2026-03-27</a:t>
+              <a:t>03-29(Sun)</a:t>
             </a:fld>
             <a:endParaRPr lang="ko-KR" altLang="en-US"/>
           </a:p>
@@ -2220,7 +2220,7 @@
           <a:p>
             <a:fld id="{D71FF700-8BFB-4C30-A2B6-F509E51DF773}" type="datetimeFigureOut">
               <a:rPr lang="ko-KR" altLang="en-US" smtClean="0"/>
-              <a:t>2026-03-27</a:t>
+              <a:t>03-29(Sun)</a:t>
             </a:fld>
             <a:endParaRPr lang="ko-KR" altLang="en-US"/>
           </a:p>
@@ -2497,7 +2497,7 @@
           <a:p>
             <a:fld id="{D71FF700-8BFB-4C30-A2B6-F509E51DF773}" type="datetimeFigureOut">
               <a:rPr lang="ko-KR" altLang="en-US" smtClean="0"/>
-              <a:t>2026-03-27</a:t>
+              <a:t>03-29(Sun)</a:t>
             </a:fld>
             <a:endParaRPr lang="ko-KR" altLang="en-US"/>
           </a:p>
@@ -2754,7 +2754,7 @@
           <a:p>
             <a:fld id="{D71FF700-8BFB-4C30-A2B6-F509E51DF773}" type="datetimeFigureOut">
               <a:rPr lang="ko-KR" altLang="en-US" smtClean="0"/>
-              <a:t>2026-03-27</a:t>
+              <a:t>03-29(Sun)</a:t>
             </a:fld>
             <a:endParaRPr lang="ko-KR" altLang="en-US"/>
           </a:p>
@@ -2967,7 +2967,7 @@
           <a:p>
             <a:fld id="{D71FF700-8BFB-4C30-A2B6-F509E51DF773}" type="datetimeFigureOut">
               <a:rPr lang="ko-KR" altLang="en-US" smtClean="0"/>
-              <a:t>2026-03-27</a:t>
+              <a:t>03-29(Sun)</a:t>
             </a:fld>
             <a:endParaRPr lang="ko-KR" altLang="en-US"/>
           </a:p>
@@ -4155,7 +4155,7 @@
         <p:spPr>
           <a:xfrm>
             <a:off x="603253" y="234292"/>
-            <a:ext cx="2009318" cy="946104"/>
+            <a:ext cx="2181805" cy="946104"/>
           </a:xfrm>
         </p:spPr>
         <p:txBody>
@@ -4165,7 +4165,7 @@
           <a:lstStyle/>
           <a:p>
             <a:r>
-              <a:rPr lang="ko-KR" altLang="en-US" sz="3200" b="1">
+              <a:rPr lang="ko-KR" altLang="en-US" sz="3200" b="1" dirty="0">
                 <a:solidFill>
                   <a:schemeClr val="bg1"/>
                 </a:solidFill>
@@ -4173,10 +4173,10 @@
               <a:t>기획의도</a:t>
             </a:r>
             <a:br>
-              <a:rPr lang="en-US" altLang="ko-KR" sz="3200" b="1"/>
+              <a:rPr lang="en-US" altLang="ko-KR" sz="3200" b="1" dirty="0"/>
             </a:br>
             <a:r>
-              <a:rPr lang="en-US" altLang="ko-KR" sz="1400" b="0" i="0">
+              <a:rPr lang="en-US" altLang="ko-KR" sz="1400" b="0" i="0" dirty="0">
                 <a:solidFill>
                   <a:schemeClr val="bg1">
                     <a:lumMod val="75000"/>
@@ -4187,7 +4187,7 @@
               </a:rPr>
               <a:t>Background &amp; Purpose</a:t>
             </a:r>
-            <a:endParaRPr lang="ko-KR" altLang="en-US" sz="1400" b="1">
+            <a:endParaRPr lang="ko-KR" altLang="en-US" sz="1400" b="1" dirty="0">
               <a:solidFill>
                 <a:schemeClr val="bg1">
                   <a:lumMod val="75000"/>
@@ -5033,8 +5033,8 @@
         </p:nvSpPr>
         <p:spPr>
           <a:xfrm>
-            <a:off x="603253" y="234292"/>
-            <a:ext cx="2009318" cy="946104"/>
+            <a:off x="603252" y="234292"/>
+            <a:ext cx="2217807" cy="946104"/>
           </a:xfrm>
         </p:spPr>
         <p:txBody>
@@ -5044,7 +5044,7 @@
           <a:lstStyle/>
           <a:p>
             <a:r>
-              <a:rPr lang="ko-KR" altLang="en-US" sz="3200" b="1">
+              <a:rPr lang="ko-KR" altLang="en-US" sz="3200" b="1" dirty="0">
                 <a:solidFill>
                   <a:schemeClr val="bg1"/>
                 </a:solidFill>
@@ -5052,10 +5052,10 @@
               <a:t>기획의도</a:t>
             </a:r>
             <a:br>
-              <a:rPr lang="en-US" altLang="ko-KR" sz="3200" b="1"/>
+              <a:rPr lang="en-US" altLang="ko-KR" sz="3200" b="1" dirty="0"/>
             </a:br>
             <a:r>
-              <a:rPr lang="en-US" altLang="ko-KR" sz="1400" b="0" i="0">
+              <a:rPr lang="en-US" altLang="ko-KR" sz="1400" b="0" i="0" dirty="0">
                 <a:solidFill>
                   <a:schemeClr val="bg1">
                     <a:lumMod val="75000"/>
@@ -5066,7 +5066,7 @@
               </a:rPr>
               <a:t>Background &amp; Purpose</a:t>
             </a:r>
-            <a:endParaRPr lang="ko-KR" altLang="en-US" sz="1400" b="1">
+            <a:endParaRPr lang="ko-KR" altLang="en-US" sz="1400" b="1" dirty="0">
               <a:solidFill>
                 <a:schemeClr val="bg1">
                   <a:lumMod val="75000"/>
@@ -5850,7 +5850,7 @@
         <p:spPr>
           <a:xfrm>
             <a:off x="603252" y="232090"/>
-            <a:ext cx="2110259" cy="946104"/>
+            <a:ext cx="2427331" cy="946104"/>
           </a:xfrm>
           <a:prstGeom prst="rect">
             <a:avLst/>
@@ -5881,7 +5881,7 @@
           </a:lstStyle>
           <a:p>
             <a:r>
-              <a:rPr lang="ko-KR" altLang="en-US" sz="3200" b="1">
+              <a:rPr lang="ko-KR" altLang="en-US" sz="3200" b="1" dirty="0">
                 <a:solidFill>
                   <a:schemeClr val="bg1"/>
                 </a:solidFill>
@@ -5889,10 +5889,10 @@
               <a:t>개발목표</a:t>
             </a:r>
             <a:br>
-              <a:rPr lang="en-US" altLang="ko-KR" sz="3200" b="1"/>
+              <a:rPr lang="en-US" altLang="ko-KR" sz="3200" b="1" dirty="0"/>
             </a:br>
             <a:r>
-              <a:rPr lang="en-US" altLang="ko-KR" sz="1400" b="0" i="0">
+              <a:rPr lang="en-US" altLang="ko-KR" sz="1400" b="0" i="0" dirty="0">
                 <a:solidFill>
                   <a:schemeClr val="bg1">
                     <a:lumMod val="75000"/>
@@ -5903,7 +5903,7 @@
               </a:rPr>
               <a:t>Development Objectives</a:t>
             </a:r>
-            <a:endParaRPr lang="ko-KR" altLang="en-US" sz="1400" b="1">
+            <a:endParaRPr lang="ko-KR" altLang="en-US" sz="1400" b="1" dirty="0">
               <a:solidFill>
                 <a:schemeClr val="bg1">
                   <a:lumMod val="75000"/>
@@ -6467,8 +6467,8 @@
         </p:nvSpPr>
         <p:spPr>
           <a:xfrm>
-            <a:off x="603253" y="234000"/>
-            <a:ext cx="2883105" cy="946104"/>
+            <a:off x="603254" y="234000"/>
+            <a:ext cx="2523124" cy="946104"/>
           </a:xfrm>
           <a:prstGeom prst="rect">
             <a:avLst/>
@@ -6499,7 +6499,7 @@
           </a:lstStyle>
           <a:p>
             <a:r>
-              <a:rPr lang="ko-KR" altLang="en-US" sz="3200" b="1">
+              <a:rPr lang="ko-KR" altLang="en-US" sz="3200" b="1" dirty="0">
                 <a:solidFill>
                   <a:schemeClr val="bg1"/>
                 </a:solidFill>
@@ -6507,10 +6507,10 @@
               <a:t>개발 스케줄</a:t>
             </a:r>
             <a:br>
-              <a:rPr lang="en-US" altLang="ko-KR" sz="3200" b="1"/>
+              <a:rPr lang="en-US" altLang="ko-KR" sz="3200" b="1" dirty="0"/>
             </a:br>
             <a:r>
-              <a:rPr lang="en-US" altLang="ko-KR" sz="1400" b="0" i="0">
+              <a:rPr lang="en-US" altLang="ko-KR" sz="1400" b="0" i="0" dirty="0">
                 <a:solidFill>
                   <a:schemeClr val="bg1">
                     <a:lumMod val="75000"/>
@@ -6521,7 +6521,7 @@
               </a:rPr>
               <a:t>Development Schedule</a:t>
             </a:r>
-            <a:endParaRPr lang="ko-KR" altLang="en-US" sz="1400" b="1">
+            <a:endParaRPr lang="ko-KR" altLang="en-US" sz="1400" b="1" dirty="0">
               <a:solidFill>
                 <a:schemeClr val="bg1">
                   <a:lumMod val="75000"/>
